--- a/modules/06-scanning-enumeration/slides.pptx
+++ b/modules/06-scanning-enumeration/slides.pptx
@@ -3435,7 +3435,7 @@
             <a:pPr lvl="0" algn="r" rtl="1"/>
             <a:r>
               <a:rPr/>
-              <a:t>Nmap = הליבה (פורטים→גרסאות→NSE)</a:t>
+              <a:t>Nmap = הליבה (פורטים → גרסאות → NSE)</a:t>
             </a:r>
           </a:p>
           <a:p>
